--- a/PPT/intro.pptx
+++ b/PPT/intro.pptx
@@ -137,7 +137,7 @@
       </p:grpSpPr>
       <p:sp>
         <p:nvSpPr>
-          <p:cNvPr id="747547240" name="Header Placeholder 1"/>
+          <p:cNvPr id="1067792424" name="Header Placeholder 1"/>
           <p:cNvSpPr>
             <a:spLocks noGrp="1"/>
           </p:cNvSpPr>
@@ -171,7 +171,7 @@
       </p:sp>
       <p:sp>
         <p:nvSpPr>
-          <p:cNvPr id="1508321236" name="Date Placeholder 2"/>
+          <p:cNvPr id="200708164" name="Date Placeholder 2"/>
           <p:cNvSpPr>
             <a:spLocks noGrp="1"/>
           </p:cNvSpPr>
@@ -209,7 +209,7 @@
       </p:sp>
       <p:sp>
         <p:nvSpPr>
-          <p:cNvPr id="1855710061" name="Slide Image Placeholder 3"/>
+          <p:cNvPr id="765169356" name="Slide Image Placeholder 3"/>
           <p:cNvSpPr>
             <a:spLocks noChangeAspect="1" noGrp="1" noRot="1"/>
           </p:cNvSpPr>
@@ -245,7 +245,7 @@
       </p:sp>
       <p:sp>
         <p:nvSpPr>
-          <p:cNvPr id="1245632592" name="Notes Placeholder 4"/>
+          <p:cNvPr id="1080404724" name="Notes Placeholder 4"/>
           <p:cNvSpPr>
             <a:spLocks noGrp="1"/>
           </p:cNvSpPr>
@@ -319,7 +319,7 @@
       </p:sp>
       <p:sp>
         <p:nvSpPr>
-          <p:cNvPr id="777253984" name="Footer Placeholder 5"/>
+          <p:cNvPr id="1920094744" name="Footer Placeholder 5"/>
           <p:cNvSpPr>
             <a:spLocks noGrp="1"/>
           </p:cNvSpPr>
@@ -353,7 +353,7 @@
       </p:sp>
       <p:sp>
         <p:nvSpPr>
-          <p:cNvPr id="30022931" name="Slide Number Placeholder 6"/>
+          <p:cNvPr id="2058985340" name="Slide Number Placeholder 6"/>
           <p:cNvSpPr>
             <a:spLocks noGrp="1"/>
           </p:cNvSpPr>
@@ -506,7 +506,7 @@
       </p:grpSpPr>
       <p:sp>
         <p:nvSpPr>
-          <p:cNvPr id="2" name="Slide Image Placeholder 1"/>
+          <p:cNvPr id="476958933" name="Slide Image Placeholder 1"/>
           <p:cNvSpPr>
             <a:spLocks noChangeAspect="1" noGrp="1" noRot="1"/>
           </p:cNvSpPr>
@@ -518,7 +518,7 @@
       </p:sp>
       <p:sp>
         <p:nvSpPr>
-          <p:cNvPr id="3" name="Notes Placeholder 2"/>
+          <p:cNvPr id="417544174" name="Notes Placeholder 2"/>
           <p:cNvSpPr>
             <a:spLocks noGrp="1"/>
           </p:cNvSpPr>
@@ -540,7 +540,7 @@
       </p:sp>
       <p:sp>
         <p:nvSpPr>
-          <p:cNvPr id="4" name="Slide Number Placeholder 3"/>
+          <p:cNvPr id="1092340303" name="Slide Number Placeholder 3"/>
           <p:cNvSpPr>
             <a:spLocks noGrp="1"/>
           </p:cNvSpPr>
@@ -591,7 +591,7 @@
       </p:grpSpPr>
       <p:sp>
         <p:nvSpPr>
-          <p:cNvPr id="2" name="Slide Image Placeholder 1"/>
+          <p:cNvPr id="1730132297" name="Slide Image Placeholder 1"/>
           <p:cNvSpPr>
             <a:spLocks noChangeAspect="1" noGrp="1" noRot="1"/>
           </p:cNvSpPr>
@@ -603,7 +603,7 @@
       </p:sp>
       <p:sp>
         <p:nvSpPr>
-          <p:cNvPr id="3" name="Notes Placeholder 2"/>
+          <p:cNvPr id="2026956249" name="Notes Placeholder 2"/>
           <p:cNvSpPr>
             <a:spLocks noGrp="1"/>
           </p:cNvSpPr>
@@ -625,7 +625,7 @@
       </p:sp>
       <p:sp>
         <p:nvSpPr>
-          <p:cNvPr id="4" name="Slide Number Placeholder 3"/>
+          <p:cNvPr id="1714486653" name="Slide Number Placeholder 3"/>
           <p:cNvSpPr>
             <a:spLocks noGrp="1"/>
           </p:cNvSpPr>
@@ -676,7 +676,7 @@
       </p:grpSpPr>
       <p:sp>
         <p:nvSpPr>
-          <p:cNvPr id="2" name="Slide Image Placeholder 1"/>
+          <p:cNvPr id="627738992" name="Slide Image Placeholder 1"/>
           <p:cNvSpPr>
             <a:spLocks noChangeAspect="1" noGrp="1" noRot="1"/>
           </p:cNvSpPr>
@@ -688,7 +688,7 @@
       </p:sp>
       <p:sp>
         <p:nvSpPr>
-          <p:cNvPr id="3" name="Notes Placeholder 2"/>
+          <p:cNvPr id="1481101778" name="Notes Placeholder 2"/>
           <p:cNvSpPr>
             <a:spLocks noGrp="1"/>
           </p:cNvSpPr>
@@ -710,7 +710,7 @@
       </p:sp>
       <p:sp>
         <p:nvSpPr>
-          <p:cNvPr id="4" name="Slide Number Placeholder 3"/>
+          <p:cNvPr id="555863159" name="Slide Number Placeholder 3"/>
           <p:cNvSpPr>
             <a:spLocks noGrp="1"/>
           </p:cNvSpPr>
@@ -761,7 +761,7 @@
       </p:grpSpPr>
       <p:sp>
         <p:nvSpPr>
-          <p:cNvPr id="2" name="Slide Image Placeholder 1"/>
+          <p:cNvPr id="844377729" name="Slide Image Placeholder 1"/>
           <p:cNvSpPr>
             <a:spLocks noChangeAspect="1" noGrp="1" noRot="1"/>
           </p:cNvSpPr>
@@ -773,7 +773,7 @@
       </p:sp>
       <p:sp>
         <p:nvSpPr>
-          <p:cNvPr id="3" name="Notes Placeholder 2"/>
+          <p:cNvPr id="767978378" name="Notes Placeholder 2"/>
           <p:cNvSpPr>
             <a:spLocks noGrp="1"/>
           </p:cNvSpPr>
@@ -795,7 +795,7 @@
       </p:sp>
       <p:sp>
         <p:nvSpPr>
-          <p:cNvPr id="4" name="Slide Number Placeholder 3"/>
+          <p:cNvPr id="108531430" name="Slide Number Placeholder 3"/>
           <p:cNvSpPr>
             <a:spLocks noGrp="1"/>
           </p:cNvSpPr>
@@ -846,7 +846,7 @@
       </p:grpSpPr>
       <p:grpSp>
         <p:nvGrpSpPr>
-          <p:cNvPr id="1977839108" name="Group 24"/>
+          <p:cNvPr id="1496955305" name="Group 24"/>
           <p:cNvGrpSpPr/>
           <p:nvPr/>
         </p:nvGrpSpPr>
@@ -1168,7 +1168,7 @@
       </p:grpSp>
       <p:sp>
         <p:nvSpPr>
-          <p:cNvPr id="423539292" name="Title 1"/>
+          <p:cNvPr id="283148421" name="Title 1"/>
           <p:cNvSpPr>
             <a:spLocks noGrp="1"/>
           </p:cNvSpPr>
@@ -1205,7 +1205,7 @@
       </p:sp>
       <p:sp>
         <p:nvSpPr>
-          <p:cNvPr id="1951706980" name="Subtitle 2"/>
+          <p:cNvPr id="208302364" name="Subtitle 2"/>
           <p:cNvSpPr>
             <a:spLocks noGrp="1"/>
           </p:cNvSpPr>
@@ -1327,7 +1327,7 @@
       </p:sp>
       <p:sp>
         <p:nvSpPr>
-          <p:cNvPr id="1180869316" name="Date Placeholder 3"/>
+          <p:cNvPr id="484086084" name="Date Placeholder 3"/>
           <p:cNvSpPr>
             <a:spLocks noGrp="1"/>
           </p:cNvSpPr>
@@ -1337,7 +1337,7 @@
         </p:nvSpPr>
         <p:spPr bwMode="auto">
           <a:xfrm>
-            <a:off x="9767697" y="6117336"/>
+            <a:off x="9767696" y="6117336"/>
             <a:ext cx="1143297" cy="365124"/>
           </a:xfrm>
         </p:spPr>
@@ -1354,7 +1354,7 @@
       </p:sp>
       <p:sp>
         <p:nvSpPr>
-          <p:cNvPr id="1596546457" name="Footer Placeholder 4"/>
+          <p:cNvPr id="1638459396" name="Footer Placeholder 4"/>
           <p:cNvSpPr>
             <a:spLocks noGrp="1"/>
           </p:cNvSpPr>
@@ -1381,7 +1381,7 @@
       </p:sp>
       <p:sp>
         <p:nvSpPr>
-          <p:cNvPr id="273398798" name="Slide Number Placeholder 5"/>
+          <p:cNvPr id="33872954" name="Slide Number Placeholder 5"/>
           <p:cNvSpPr>
             <a:spLocks noGrp="1"/>
           </p:cNvSpPr>
@@ -1419,7 +1419,7 @@
       </p:sp>
       <p:sp>
         <p:nvSpPr>
-          <p:cNvPr id="103959239" name="Freeform 12"/>
+          <p:cNvPr id="484679635" name="Freeform 12"/>
           <p:cNvSpPr/>
           <p:nvPr/>
         </p:nvSpPr>
@@ -1462,7 +1462,7 @@
       </p:sp>
       <p:sp>
         <p:nvSpPr>
-          <p:cNvPr id="984402331" name="Freeform 13"/>
+          <p:cNvPr id="2082726719" name="Freeform 13"/>
           <p:cNvSpPr/>
           <p:nvPr/>
         </p:nvSpPr>
@@ -1530,7 +1530,7 @@
       </p:grpSpPr>
       <p:sp>
         <p:nvSpPr>
-          <p:cNvPr id="2080241067" name="Title 1"/>
+          <p:cNvPr id="1004601761" name="Title 1"/>
           <p:cNvSpPr>
             <a:spLocks noGrp="1"/>
           </p:cNvSpPr>
@@ -1541,7 +1541,7 @@
         <p:spPr bwMode="auto">
           <a:xfrm>
             <a:off x="1484697" y="4732864"/>
-            <a:ext cx="10021321" cy="566737"/>
+            <a:ext cx="10021320" cy="566737"/>
           </a:xfrm>
         </p:spPr>
         <p:txBody>
@@ -1567,7 +1567,7 @@
       </p:sp>
       <p:sp>
         <p:nvSpPr>
-          <p:cNvPr id="840320471" name="Picture Placeholder 2"/>
+          <p:cNvPr id="124023628" name="Picture Placeholder 2"/>
           <p:cNvSpPr>
             <a:spLocks noChangeAspect="1" noGrp="1"/>
           </p:cNvSpPr>
@@ -1664,7 +1664,7 @@
       </p:sp>
       <p:sp>
         <p:nvSpPr>
-          <p:cNvPr id="476351689" name="Text Placeholder 3"/>
+          <p:cNvPr id="235446629" name="Text Placeholder 3"/>
           <p:cNvSpPr>
             <a:spLocks noGrp="1"/>
           </p:cNvSpPr>
@@ -1675,7 +1675,7 @@
         <p:spPr bwMode="auto">
           <a:xfrm>
             <a:off x="1484697" y="5299601"/>
-            <a:ext cx="10021321" cy="493711"/>
+            <a:ext cx="10021320" cy="493711"/>
           </a:xfrm>
         </p:spPr>
         <p:txBody>
@@ -1734,7 +1734,7 @@
       </p:sp>
       <p:sp>
         <p:nvSpPr>
-          <p:cNvPr id="1094858320" name="Date Placeholder 4"/>
+          <p:cNvPr id="1398487217" name="Date Placeholder 4"/>
           <p:cNvSpPr>
             <a:spLocks noGrp="1"/>
           </p:cNvSpPr>
@@ -1756,7 +1756,7 @@
       </p:sp>
       <p:sp>
         <p:nvSpPr>
-          <p:cNvPr id="711026545" name="Footer Placeholder 5"/>
+          <p:cNvPr id="1914882381" name="Footer Placeholder 5"/>
           <p:cNvSpPr>
             <a:spLocks noGrp="1"/>
           </p:cNvSpPr>
@@ -1778,7 +1778,7 @@
       </p:sp>
       <p:sp>
         <p:nvSpPr>
-          <p:cNvPr id="57007543" name="Slide Number Placeholder 6"/>
+          <p:cNvPr id="289822431" name="Slide Number Placeholder 6"/>
           <p:cNvSpPr>
             <a:spLocks noGrp="1"/>
           </p:cNvSpPr>
@@ -1836,7 +1836,7 @@
       </p:grpSpPr>
       <p:sp>
         <p:nvSpPr>
-          <p:cNvPr id="515160066" name="Title 1"/>
+          <p:cNvPr id="1864169336" name="Title 1"/>
           <p:cNvSpPr>
             <a:spLocks noGrp="1"/>
           </p:cNvSpPr>
@@ -1847,7 +1847,7 @@
         <p:spPr bwMode="auto">
           <a:xfrm>
             <a:off x="1484698" y="685800"/>
-            <a:ext cx="10021321" cy="3047999"/>
+            <a:ext cx="10021320" cy="3047999"/>
           </a:xfrm>
         </p:spPr>
         <p:txBody>
@@ -1873,7 +1873,7 @@
       </p:sp>
       <p:sp>
         <p:nvSpPr>
-          <p:cNvPr id="1979249736" name="Text Placeholder 2"/>
+          <p:cNvPr id="1669108520" name="Text Placeholder 2"/>
           <p:cNvSpPr>
             <a:spLocks noGrp="1"/>
           </p:cNvSpPr>
@@ -1995,7 +1995,7 @@
       </p:sp>
       <p:sp>
         <p:nvSpPr>
-          <p:cNvPr id="1097498890" name="Date Placeholder 3"/>
+          <p:cNvPr id="164592064" name="Date Placeholder 3"/>
           <p:cNvSpPr>
             <a:spLocks noGrp="1"/>
           </p:cNvSpPr>
@@ -2017,7 +2017,7 @@
       </p:sp>
       <p:sp>
         <p:nvSpPr>
-          <p:cNvPr id="1286232111" name="Footer Placeholder 4"/>
+          <p:cNvPr id="843745578" name="Footer Placeholder 4"/>
           <p:cNvSpPr>
             <a:spLocks noGrp="1"/>
           </p:cNvSpPr>
@@ -2039,7 +2039,7 @@
       </p:sp>
       <p:sp>
         <p:nvSpPr>
-          <p:cNvPr id="1357473150" name="Slide Number Placeholder 5"/>
+          <p:cNvPr id="2065738346" name="Slide Number Placeholder 5"/>
           <p:cNvSpPr>
             <a:spLocks noGrp="1"/>
           </p:cNvSpPr>
@@ -2097,7 +2097,7 @@
       </p:grpSpPr>
       <p:sp>
         <p:nvSpPr>
-          <p:cNvPr id="2076168368" name="TextBox 13"/>
+          <p:cNvPr id="76814233" name="TextBox 13"/>
           <p:cNvSpPr txBox="1"/>
           <p:nvPr/>
         </p:nvSpPr>
@@ -2201,7 +2201,7 @@
       </p:sp>
       <p:sp>
         <p:nvSpPr>
-          <p:cNvPr id="1951829683" name="TextBox 14"/>
+          <p:cNvPr id="794853231" name="TextBox 14"/>
           <p:cNvSpPr txBox="1"/>
           <p:nvPr/>
         </p:nvSpPr>
@@ -2305,7 +2305,7 @@
       </p:sp>
       <p:sp>
         <p:nvSpPr>
-          <p:cNvPr id="1154973982" name="Title 1"/>
+          <p:cNvPr id="433978971" name="Title 1"/>
           <p:cNvSpPr>
             <a:spLocks noGrp="1"/>
           </p:cNvSpPr>
@@ -2346,7 +2346,7 @@
       </p:sp>
       <p:sp>
         <p:nvSpPr>
-          <p:cNvPr id="1786325138" name="Text Placeholder 9"/>
+          <p:cNvPr id="1909985575" name="Text Placeholder 9"/>
           <p:cNvSpPr>
             <a:spLocks noGrp="1"/>
           </p:cNvSpPr>
@@ -2356,7 +2356,7 @@
         </p:nvSpPr>
         <p:spPr bwMode="auto">
           <a:xfrm>
-            <a:off x="2130979" y="3428998"/>
+            <a:off x="2130979" y="3428997"/>
             <a:ext cx="8841503" cy="380999"/>
           </a:xfrm>
         </p:spPr>
@@ -2405,7 +2405,7 @@
       </p:sp>
       <p:sp>
         <p:nvSpPr>
-          <p:cNvPr id="557492818" name="Text Placeholder 2"/>
+          <p:cNvPr id="181352384" name="Text Placeholder 2"/>
           <p:cNvSpPr>
             <a:spLocks noGrp="1"/>
           </p:cNvSpPr>
@@ -2416,7 +2416,7 @@
         <p:spPr bwMode="auto">
           <a:xfrm>
             <a:off x="1484697" y="4343400"/>
-            <a:ext cx="10021321" cy="1447799"/>
+            <a:ext cx="10021320" cy="1447799"/>
           </a:xfrm>
         </p:spPr>
         <p:txBody>
@@ -2527,7 +2527,7 @@
       </p:sp>
       <p:sp>
         <p:nvSpPr>
-          <p:cNvPr id="1045623247" name="Date Placeholder 3"/>
+          <p:cNvPr id="1148143588" name="Date Placeholder 3"/>
           <p:cNvSpPr>
             <a:spLocks noGrp="1"/>
           </p:cNvSpPr>
@@ -2549,7 +2549,7 @@
       </p:sp>
       <p:sp>
         <p:nvSpPr>
-          <p:cNvPr id="991202790" name="Footer Placeholder 4"/>
+          <p:cNvPr id="1341005018" name="Footer Placeholder 4"/>
           <p:cNvSpPr>
             <a:spLocks noGrp="1"/>
           </p:cNvSpPr>
@@ -2571,7 +2571,7 @@
       </p:sp>
       <p:sp>
         <p:nvSpPr>
-          <p:cNvPr id="1162242415" name="Slide Number Placeholder 5"/>
+          <p:cNvPr id="538535662" name="Slide Number Placeholder 5"/>
           <p:cNvSpPr>
             <a:spLocks noGrp="1"/>
           </p:cNvSpPr>
@@ -2629,7 +2629,7 @@
       </p:grpSpPr>
       <p:sp>
         <p:nvSpPr>
-          <p:cNvPr id="388020234" name="Title 1"/>
+          <p:cNvPr id="1551230635" name="Title 1"/>
           <p:cNvSpPr>
             <a:spLocks noGrp="1"/>
           </p:cNvSpPr>
@@ -2666,7 +2666,7 @@
       </p:sp>
       <p:sp>
         <p:nvSpPr>
-          <p:cNvPr id="789316190" name="Text Placeholder 2"/>
+          <p:cNvPr id="480690865" name="Text Placeholder 2"/>
           <p:cNvSpPr>
             <a:spLocks noGrp="1"/>
           </p:cNvSpPr>
@@ -2788,7 +2788,7 @@
       </p:sp>
       <p:sp>
         <p:nvSpPr>
-          <p:cNvPr id="1155292016" name="Date Placeholder 3"/>
+          <p:cNvPr id="262856896" name="Date Placeholder 3"/>
           <p:cNvSpPr>
             <a:spLocks noGrp="1"/>
           </p:cNvSpPr>
@@ -2810,7 +2810,7 @@
       </p:sp>
       <p:sp>
         <p:nvSpPr>
-          <p:cNvPr id="1420442783" name="Footer Placeholder 4"/>
+          <p:cNvPr id="618276864" name="Footer Placeholder 4"/>
           <p:cNvSpPr>
             <a:spLocks noGrp="1"/>
           </p:cNvSpPr>
@@ -2832,7 +2832,7 @@
       </p:sp>
       <p:sp>
         <p:nvSpPr>
-          <p:cNvPr id="1475897397" name="Slide Number Placeholder 5"/>
+          <p:cNvPr id="1243140884" name="Slide Number Placeholder 5"/>
           <p:cNvSpPr>
             <a:spLocks noGrp="1"/>
           </p:cNvSpPr>
@@ -2890,7 +2890,7 @@
       </p:grpSpPr>
       <p:sp>
         <p:nvSpPr>
-          <p:cNvPr id="1726625822" name="TextBox 13"/>
+          <p:cNvPr id="1458591487" name="TextBox 13"/>
           <p:cNvSpPr txBox="1"/>
           <p:nvPr/>
         </p:nvSpPr>
@@ -2994,7 +2994,7 @@
       </p:sp>
       <p:sp>
         <p:nvSpPr>
-          <p:cNvPr id="1363225832" name="TextBox 14"/>
+          <p:cNvPr id="678707056" name="TextBox 14"/>
           <p:cNvSpPr txBox="1"/>
           <p:nvPr/>
         </p:nvSpPr>
@@ -3098,7 +3098,7 @@
       </p:sp>
       <p:sp>
         <p:nvSpPr>
-          <p:cNvPr id="359774693" name="Title 1"/>
+          <p:cNvPr id="495108213" name="Title 1"/>
           <p:cNvSpPr>
             <a:spLocks noGrp="1"/>
           </p:cNvSpPr>
@@ -3139,7 +3139,7 @@
       </p:sp>
       <p:sp>
         <p:nvSpPr>
-          <p:cNvPr id="1855303570" name="Text Placeholder 9"/>
+          <p:cNvPr id="816633428" name="Text Placeholder 9"/>
           <p:cNvSpPr>
             <a:spLocks noGrp="1"/>
           </p:cNvSpPr>
@@ -3188,7 +3188,7 @@
       </p:sp>
       <p:sp>
         <p:nvSpPr>
-          <p:cNvPr id="900415441" name="Text Placeholder 2"/>
+          <p:cNvPr id="304853094" name="Text Placeholder 2"/>
           <p:cNvSpPr>
             <a:spLocks noGrp="1"/>
           </p:cNvSpPr>
@@ -3310,7 +3310,7 @@
       </p:sp>
       <p:sp>
         <p:nvSpPr>
-          <p:cNvPr id="125550152" name="Date Placeholder 3"/>
+          <p:cNvPr id="744746052" name="Date Placeholder 3"/>
           <p:cNvSpPr>
             <a:spLocks noGrp="1"/>
           </p:cNvSpPr>
@@ -3332,7 +3332,7 @@
       </p:sp>
       <p:sp>
         <p:nvSpPr>
-          <p:cNvPr id="957604916" name="Footer Placeholder 4"/>
+          <p:cNvPr id="126396286" name="Footer Placeholder 4"/>
           <p:cNvSpPr>
             <a:spLocks noGrp="1"/>
           </p:cNvSpPr>
@@ -3354,7 +3354,7 @@
       </p:sp>
       <p:sp>
         <p:nvSpPr>
-          <p:cNvPr id="1126492279" name="Slide Number Placeholder 5"/>
+          <p:cNvPr id="1013602347" name="Slide Number Placeholder 5"/>
           <p:cNvSpPr>
             <a:spLocks noGrp="1"/>
           </p:cNvSpPr>
@@ -3412,7 +3412,7 @@
       </p:grpSpPr>
       <p:sp>
         <p:nvSpPr>
-          <p:cNvPr id="1076595293" name="Title 1"/>
+          <p:cNvPr id="1902777516" name="Title 1"/>
           <p:cNvSpPr>
             <a:spLocks noGrp="1"/>
           </p:cNvSpPr>
@@ -3423,7 +3423,7 @@
         <p:spPr bwMode="auto">
           <a:xfrm>
             <a:off x="1484699" y="685800"/>
-            <a:ext cx="10021321" cy="2727324"/>
+            <a:ext cx="10021320" cy="2727324"/>
           </a:xfrm>
         </p:spPr>
         <p:txBody>
@@ -3449,7 +3449,7 @@
       </p:sp>
       <p:sp>
         <p:nvSpPr>
-          <p:cNvPr id="313126306" name="Text Placeholder 9"/>
+          <p:cNvPr id="424311007" name="Text Placeholder 9"/>
           <p:cNvSpPr>
             <a:spLocks noGrp="1"/>
           </p:cNvSpPr>
@@ -3460,7 +3460,7 @@
         <p:spPr bwMode="auto">
           <a:xfrm>
             <a:off x="1484698" y="3505198"/>
-            <a:ext cx="10021322" cy="838199"/>
+            <a:ext cx="10021322" cy="838198"/>
           </a:xfrm>
         </p:spPr>
         <p:txBody>
@@ -3498,7 +3498,7 @@
       </p:sp>
       <p:sp>
         <p:nvSpPr>
-          <p:cNvPr id="1990425724" name="Text Placeholder 2"/>
+          <p:cNvPr id="1879745244" name="Text Placeholder 2"/>
           <p:cNvSpPr>
             <a:spLocks noGrp="1"/>
           </p:cNvSpPr>
@@ -3620,7 +3620,7 @@
       </p:sp>
       <p:sp>
         <p:nvSpPr>
-          <p:cNvPr id="2130959069" name="Date Placeholder 3"/>
+          <p:cNvPr id="753561162" name="Date Placeholder 3"/>
           <p:cNvSpPr>
             <a:spLocks noGrp="1"/>
           </p:cNvSpPr>
@@ -3642,7 +3642,7 @@
       </p:sp>
       <p:sp>
         <p:nvSpPr>
-          <p:cNvPr id="1912280941" name="Footer Placeholder 4"/>
+          <p:cNvPr id="1007032370" name="Footer Placeholder 4"/>
           <p:cNvSpPr>
             <a:spLocks noGrp="1"/>
           </p:cNvSpPr>
@@ -3664,7 +3664,7 @@
       </p:sp>
       <p:sp>
         <p:nvSpPr>
-          <p:cNvPr id="791796869" name="Slide Number Placeholder 5"/>
+          <p:cNvPr id="1572964470" name="Slide Number Placeholder 5"/>
           <p:cNvSpPr>
             <a:spLocks noGrp="1"/>
           </p:cNvSpPr>
@@ -3722,7 +3722,7 @@
       </p:grpSpPr>
       <p:sp>
         <p:nvSpPr>
-          <p:cNvPr id="712782509" name="Title 1"/>
+          <p:cNvPr id="1653033622" name="Title 1"/>
           <p:cNvSpPr>
             <a:spLocks noGrp="1"/>
           </p:cNvSpPr>
@@ -3752,7 +3752,7 @@
       </p:sp>
       <p:sp>
         <p:nvSpPr>
-          <p:cNvPr id="1612246293" name="Vertical Text Placeholder 2"/>
+          <p:cNvPr id="1240562734" name="Vertical Text Placeholder 2"/>
           <p:cNvSpPr>
             <a:spLocks noGrp="1"/>
           </p:cNvSpPr>
@@ -3818,7 +3818,7 @@
       </p:sp>
       <p:sp>
         <p:nvSpPr>
-          <p:cNvPr id="820830024" name="Date Placeholder 3"/>
+          <p:cNvPr id="53365909" name="Date Placeholder 3"/>
           <p:cNvSpPr>
             <a:spLocks noGrp="1"/>
           </p:cNvSpPr>
@@ -3840,7 +3840,7 @@
       </p:sp>
       <p:sp>
         <p:nvSpPr>
-          <p:cNvPr id="670297625" name="Footer Placeholder 4"/>
+          <p:cNvPr id="949925300" name="Footer Placeholder 4"/>
           <p:cNvSpPr>
             <a:spLocks noGrp="1"/>
           </p:cNvSpPr>
@@ -3862,7 +3862,7 @@
       </p:sp>
       <p:sp>
         <p:nvSpPr>
-          <p:cNvPr id="1377895507" name="Slide Number Placeholder 5"/>
+          <p:cNvPr id="1536207322" name="Slide Number Placeholder 5"/>
           <p:cNvSpPr>
             <a:spLocks noGrp="1"/>
           </p:cNvSpPr>
@@ -3920,7 +3920,7 @@
       </p:grpSpPr>
       <p:sp>
         <p:nvSpPr>
-          <p:cNvPr id="1995192427" name="Vertical Title 1"/>
+          <p:cNvPr id="1243364431" name="Vertical Title 1"/>
           <p:cNvSpPr>
             <a:spLocks noGrp="1"/>
           </p:cNvSpPr>
@@ -3951,7 +3951,7 @@
       </p:sp>
       <p:sp>
         <p:nvSpPr>
-          <p:cNvPr id="717458646" name="Vertical Text Placeholder 2"/>
+          <p:cNvPr id="1235849124" name="Vertical Text Placeholder 2"/>
           <p:cNvSpPr>
             <a:spLocks noGrp="1"/>
           </p:cNvSpPr>
@@ -4022,7 +4022,7 @@
       </p:sp>
       <p:sp>
         <p:nvSpPr>
-          <p:cNvPr id="896660386" name="Date Placeholder 3"/>
+          <p:cNvPr id="631318520" name="Date Placeholder 3"/>
           <p:cNvSpPr>
             <a:spLocks noGrp="1"/>
           </p:cNvSpPr>
@@ -4044,7 +4044,7 @@
       </p:sp>
       <p:sp>
         <p:nvSpPr>
-          <p:cNvPr id="217695331" name="Footer Placeholder 4"/>
+          <p:cNvPr id="1484678788" name="Footer Placeholder 4"/>
           <p:cNvSpPr>
             <a:spLocks noGrp="1"/>
           </p:cNvSpPr>
@@ -4066,7 +4066,7 @@
       </p:sp>
       <p:sp>
         <p:nvSpPr>
-          <p:cNvPr id="2079170024" name="Slide Number Placeholder 5"/>
+          <p:cNvPr id="1686440121" name="Slide Number Placeholder 5"/>
           <p:cNvSpPr>
             <a:spLocks noGrp="1"/>
           </p:cNvSpPr>
@@ -4124,7 +4124,7 @@
       </p:grpSpPr>
       <p:sp>
         <p:nvSpPr>
-          <p:cNvPr id="887428655" name="Title 1"/>
+          <p:cNvPr id="1241311609" name="Title 1"/>
           <p:cNvSpPr>
             <a:spLocks noGrp="1"/>
           </p:cNvSpPr>
@@ -4135,7 +4135,7 @@
         <p:spPr bwMode="auto">
           <a:xfrm>
             <a:off x="1309510" y="457200"/>
-            <a:ext cx="10272889" cy="1981199"/>
+            <a:ext cx="10272888" cy="1981199"/>
           </a:xfrm>
         </p:spPr>
         <p:txBody>
@@ -4155,7 +4155,7 @@
       </p:sp>
       <p:sp>
         <p:nvSpPr>
-          <p:cNvPr id="623491980" name="Content Placeholder 2"/>
+          <p:cNvPr id="373722486" name="Content Placeholder 2"/>
           <p:cNvSpPr>
             <a:spLocks noGrp="1"/>
           </p:cNvSpPr>
@@ -4166,7 +4166,7 @@
         <p:spPr bwMode="auto">
           <a:xfrm>
             <a:off x="1309510" y="2666999"/>
-            <a:ext cx="10272889" cy="3332815"/>
+            <a:ext cx="10272888" cy="3332815"/>
           </a:xfrm>
         </p:spPr>
         <p:txBody>
@@ -4226,7 +4226,7 @@
       </p:sp>
       <p:sp>
         <p:nvSpPr>
-          <p:cNvPr id="2027989163" name="Date Placeholder 3"/>
+          <p:cNvPr id="1422521313" name="Date Placeholder 3"/>
           <p:cNvSpPr>
             <a:spLocks noGrp="1"/>
           </p:cNvSpPr>
@@ -4253,7 +4253,7 @@
       </p:sp>
       <p:sp>
         <p:nvSpPr>
-          <p:cNvPr id="89886185" name="Footer Placeholder 4"/>
+          <p:cNvPr id="613659853" name="Footer Placeholder 4"/>
           <p:cNvSpPr>
             <a:spLocks noGrp="1"/>
           </p:cNvSpPr>
@@ -4280,7 +4280,7 @@
       </p:sp>
       <p:sp>
         <p:nvSpPr>
-          <p:cNvPr id="1947773062" name="Slide Number Placeholder 5"/>
+          <p:cNvPr id="834589661" name="Slide Number Placeholder 5"/>
           <p:cNvSpPr>
             <a:spLocks noGrp="1"/>
           </p:cNvSpPr>
@@ -4343,7 +4343,7 @@
       </p:grpSpPr>
       <p:sp>
         <p:nvSpPr>
-          <p:cNvPr id="2049804924" name="Title 1"/>
+          <p:cNvPr id="1358536596" name="Title 1"/>
           <p:cNvSpPr>
             <a:spLocks noGrp="1"/>
           </p:cNvSpPr>
@@ -4378,7 +4378,7 @@
       </p:sp>
       <p:sp>
         <p:nvSpPr>
-          <p:cNvPr id="1569180629" name="Text Placeholder 2"/>
+          <p:cNvPr id="1598415275" name="Text Placeholder 2"/>
           <p:cNvSpPr>
             <a:spLocks noGrp="1"/>
           </p:cNvSpPr>
@@ -4500,7 +4500,7 @@
       </p:sp>
       <p:sp>
         <p:nvSpPr>
-          <p:cNvPr id="210240574" name="Date Placeholder 3"/>
+          <p:cNvPr id="569302218" name="Date Placeholder 3"/>
           <p:cNvSpPr>
             <a:spLocks noGrp="1"/>
           </p:cNvSpPr>
@@ -4522,7 +4522,7 @@
       </p:sp>
       <p:sp>
         <p:nvSpPr>
-          <p:cNvPr id="1255550435" name="Footer Placeholder 4"/>
+          <p:cNvPr id="885886297" name="Footer Placeholder 4"/>
           <p:cNvSpPr>
             <a:spLocks noGrp="1"/>
           </p:cNvSpPr>
@@ -4544,7 +4544,7 @@
       </p:sp>
       <p:sp>
         <p:nvSpPr>
-          <p:cNvPr id="884163105" name="Slide Number Placeholder 5"/>
+          <p:cNvPr id="597839178" name="Slide Number Placeholder 5"/>
           <p:cNvSpPr>
             <a:spLocks noGrp="1"/>
           </p:cNvSpPr>
@@ -4607,7 +4607,7 @@
       </p:grpSpPr>
       <p:sp>
         <p:nvSpPr>
-          <p:cNvPr id="746497303" name="Title 1"/>
+          <p:cNvPr id="1074674986" name="Title 1"/>
           <p:cNvSpPr>
             <a:spLocks noGrp="1"/>
           </p:cNvSpPr>
@@ -4618,7 +4618,7 @@
         <p:spPr bwMode="auto">
           <a:xfrm>
             <a:off x="1309510" y="685800"/>
-            <a:ext cx="10272889" cy="1752598"/>
+            <a:ext cx="10272888" cy="1752598"/>
           </a:xfrm>
         </p:spPr>
         <p:txBody>
@@ -4638,7 +4638,7 @@
       </p:sp>
       <p:sp>
         <p:nvSpPr>
-          <p:cNvPr id="316736496" name="Content Placeholder 2"/>
+          <p:cNvPr id="1786787871" name="Content Placeholder 2"/>
           <p:cNvSpPr>
             <a:spLocks noGrp="1"/>
           </p:cNvSpPr>
@@ -4739,7 +4739,7 @@
       </p:sp>
       <p:sp>
         <p:nvSpPr>
-          <p:cNvPr id="1584348593" name="Content Placeholder 3"/>
+          <p:cNvPr id="401744678" name="Content Placeholder 3"/>
           <p:cNvSpPr>
             <a:spLocks noGrp="1"/>
           </p:cNvSpPr>
@@ -4749,7 +4749,7 @@
         </p:nvSpPr>
         <p:spPr bwMode="auto">
           <a:xfrm>
-            <a:off x="6595871" y="2666999"/>
+            <a:off x="6595870" y="2666999"/>
             <a:ext cx="4986527" cy="3346823"/>
           </a:xfrm>
         </p:spPr>
@@ -4840,7 +4840,7 @@
       </p:sp>
       <p:sp>
         <p:nvSpPr>
-          <p:cNvPr id="1884923987" name="Date Placeholder 4"/>
+          <p:cNvPr id="1129461516" name="Date Placeholder 4"/>
           <p:cNvSpPr>
             <a:spLocks noGrp="1"/>
           </p:cNvSpPr>
@@ -4862,7 +4862,7 @@
       </p:sp>
       <p:sp>
         <p:nvSpPr>
-          <p:cNvPr id="767374488" name="Footer Placeholder 5"/>
+          <p:cNvPr id="483179349" name="Footer Placeholder 5"/>
           <p:cNvSpPr>
             <a:spLocks noGrp="1"/>
           </p:cNvSpPr>
@@ -4884,7 +4884,7 @@
       </p:sp>
       <p:sp>
         <p:nvSpPr>
-          <p:cNvPr id="312612034" name="Slide Number Placeholder 6"/>
+          <p:cNvPr id="1314413345" name="Slide Number Placeholder 6"/>
           <p:cNvSpPr>
             <a:spLocks noGrp="1"/>
           </p:cNvSpPr>
@@ -4942,7 +4942,7 @@
       </p:grpSpPr>
       <p:sp>
         <p:nvSpPr>
-          <p:cNvPr id="637337800" name="Title 1"/>
+          <p:cNvPr id="240551914" name="Title 1"/>
           <p:cNvSpPr>
             <a:spLocks noGrp="1"/>
           </p:cNvSpPr>
@@ -4972,7 +4972,7 @@
       </p:sp>
       <p:sp>
         <p:nvSpPr>
-          <p:cNvPr id="2074491215" name="Text Placeholder 2"/>
+          <p:cNvPr id="1277560168" name="Text Placeholder 2"/>
           <p:cNvSpPr>
             <a:spLocks noGrp="1"/>
           </p:cNvSpPr>
@@ -5048,7 +5048,7 @@
       </p:sp>
       <p:sp>
         <p:nvSpPr>
-          <p:cNvPr id="509303731" name="Content Placeholder 3"/>
+          <p:cNvPr id="631754074" name="Content Placeholder 3"/>
           <p:cNvSpPr>
             <a:spLocks noGrp="1"/>
           </p:cNvSpPr>
@@ -5149,7 +5149,7 @@
       </p:sp>
       <p:sp>
         <p:nvSpPr>
-          <p:cNvPr id="834359637" name="Text Placeholder 4"/>
+          <p:cNvPr id="428942253" name="Text Placeholder 4"/>
           <p:cNvSpPr>
             <a:spLocks noGrp="1"/>
           </p:cNvSpPr>
@@ -5225,7 +5225,7 @@
       </p:sp>
       <p:sp>
         <p:nvSpPr>
-          <p:cNvPr id="1457818559" name="Content Placeholder 5"/>
+          <p:cNvPr id="1419499431" name="Content Placeholder 5"/>
           <p:cNvSpPr>
             <a:spLocks noGrp="1"/>
           </p:cNvSpPr>
@@ -5326,7 +5326,7 @@
       </p:sp>
       <p:sp>
         <p:nvSpPr>
-          <p:cNvPr id="1765326650" name="Date Placeholder 6"/>
+          <p:cNvPr id="1137612951" name="Date Placeholder 6"/>
           <p:cNvSpPr>
             <a:spLocks noGrp="1"/>
           </p:cNvSpPr>
@@ -5348,7 +5348,7 @@
       </p:sp>
       <p:sp>
         <p:nvSpPr>
-          <p:cNvPr id="1798049138" name="Footer Placeholder 7"/>
+          <p:cNvPr id="2097992432" name="Footer Placeholder 7"/>
           <p:cNvSpPr>
             <a:spLocks noGrp="1"/>
           </p:cNvSpPr>
@@ -5370,7 +5370,7 @@
       </p:sp>
       <p:sp>
         <p:nvSpPr>
-          <p:cNvPr id="1466096711" name="Slide Number Placeholder 8"/>
+          <p:cNvPr id="985332949" name="Slide Number Placeholder 8"/>
           <p:cNvSpPr>
             <a:spLocks noGrp="1"/>
           </p:cNvSpPr>
@@ -5428,7 +5428,7 @@
       </p:grpSpPr>
       <p:sp>
         <p:nvSpPr>
-          <p:cNvPr id="235303413" name="Title 1"/>
+          <p:cNvPr id="994076338" name="Title 1"/>
           <p:cNvSpPr>
             <a:spLocks noGrp="1"/>
           </p:cNvSpPr>
@@ -5454,7 +5454,7 @@
       </p:sp>
       <p:sp>
         <p:nvSpPr>
-          <p:cNvPr id="1246792353" name="Date Placeholder 2"/>
+          <p:cNvPr id="106031930" name="Date Placeholder 2"/>
           <p:cNvSpPr>
             <a:spLocks noGrp="1"/>
           </p:cNvSpPr>
@@ -5476,7 +5476,7 @@
       </p:sp>
       <p:sp>
         <p:nvSpPr>
-          <p:cNvPr id="2111657970" name="Footer Placeholder 3"/>
+          <p:cNvPr id="1681453722" name="Footer Placeholder 3"/>
           <p:cNvSpPr>
             <a:spLocks noGrp="1"/>
           </p:cNvSpPr>
@@ -5498,7 +5498,7 @@
       </p:sp>
       <p:sp>
         <p:nvSpPr>
-          <p:cNvPr id="1591785706" name="Slide Number Placeholder 4"/>
+          <p:cNvPr id="1606912369" name="Slide Number Placeholder 4"/>
           <p:cNvSpPr>
             <a:spLocks noGrp="1"/>
           </p:cNvSpPr>
@@ -5556,7 +5556,7 @@
       </p:grpSpPr>
       <p:sp>
         <p:nvSpPr>
-          <p:cNvPr id="1063862215" name="Date Placeholder 1"/>
+          <p:cNvPr id="1225276397" name="Date Placeholder 1"/>
           <p:cNvSpPr>
             <a:spLocks noGrp="1"/>
           </p:cNvSpPr>
@@ -5578,7 +5578,7 @@
       </p:sp>
       <p:sp>
         <p:nvSpPr>
-          <p:cNvPr id="1138771241" name="Footer Placeholder 2"/>
+          <p:cNvPr id="1579031154" name="Footer Placeholder 2"/>
           <p:cNvSpPr>
             <a:spLocks noGrp="1"/>
           </p:cNvSpPr>
@@ -5600,7 +5600,7 @@
       </p:sp>
       <p:sp>
         <p:nvSpPr>
-          <p:cNvPr id="2002725409" name="Slide Number Placeholder 3"/>
+          <p:cNvPr id="1082273739" name="Slide Number Placeholder 3"/>
           <p:cNvSpPr>
             <a:spLocks noGrp="1"/>
           </p:cNvSpPr>
@@ -5658,7 +5658,7 @@
       </p:grpSpPr>
       <p:sp>
         <p:nvSpPr>
-          <p:cNvPr id="965011923" name="Title 1"/>
+          <p:cNvPr id="74549711" name="Title 1"/>
           <p:cNvSpPr>
             <a:spLocks noGrp="1"/>
           </p:cNvSpPr>
@@ -5695,7 +5695,7 @@
       </p:sp>
       <p:sp>
         <p:nvSpPr>
-          <p:cNvPr id="1678876722" name="Content Placeholder 2"/>
+          <p:cNvPr id="1238942850" name="Content Placeholder 2"/>
           <p:cNvSpPr>
             <a:spLocks noGrp="1"/>
           </p:cNvSpPr>
@@ -5796,7 +5796,7 @@
       </p:sp>
       <p:sp>
         <p:nvSpPr>
-          <p:cNvPr id="1900954871" name="Text Placeholder 3"/>
+          <p:cNvPr id="763057493" name="Text Placeholder 3"/>
           <p:cNvSpPr>
             <a:spLocks noGrp="1"/>
           </p:cNvSpPr>
@@ -5866,7 +5866,7 @@
       </p:sp>
       <p:sp>
         <p:nvSpPr>
-          <p:cNvPr id="118978569" name="Date Placeholder 4"/>
+          <p:cNvPr id="727140370" name="Date Placeholder 4"/>
           <p:cNvSpPr>
             <a:spLocks noGrp="1"/>
           </p:cNvSpPr>
@@ -5888,7 +5888,7 @@
       </p:sp>
       <p:sp>
         <p:nvSpPr>
-          <p:cNvPr id="1041689641" name="Footer Placeholder 5"/>
+          <p:cNvPr id="341298429" name="Footer Placeholder 5"/>
           <p:cNvSpPr>
             <a:spLocks noGrp="1"/>
           </p:cNvSpPr>
@@ -5910,7 +5910,7 @@
       </p:sp>
       <p:sp>
         <p:nvSpPr>
-          <p:cNvPr id="1390292231" name="Slide Number Placeholder 6"/>
+          <p:cNvPr id="1033615190" name="Slide Number Placeholder 6"/>
           <p:cNvSpPr>
             <a:spLocks noGrp="1"/>
           </p:cNvSpPr>
@@ -5968,7 +5968,7 @@
       </p:grpSpPr>
       <p:sp>
         <p:nvSpPr>
-          <p:cNvPr id="1215419915" name="Title 1"/>
+          <p:cNvPr id="132720045" name="Title 1"/>
           <p:cNvSpPr>
             <a:spLocks noGrp="1"/>
           </p:cNvSpPr>
@@ -6005,7 +6005,7 @@
       </p:sp>
       <p:sp>
         <p:nvSpPr>
-          <p:cNvPr id="1422782664" name="Picture Placeholder 2"/>
+          <p:cNvPr id="2146865483" name="Picture Placeholder 2"/>
           <p:cNvSpPr>
             <a:spLocks noChangeAspect="1" noGrp="1"/>
           </p:cNvSpPr>
@@ -6102,7 +6102,7 @@
       </p:sp>
       <p:sp>
         <p:nvSpPr>
-          <p:cNvPr id="2133279097" name="Text Placeholder 3"/>
+          <p:cNvPr id="1177025813" name="Text Placeholder 3"/>
           <p:cNvSpPr>
             <a:spLocks noGrp="1"/>
           </p:cNvSpPr>
@@ -6172,7 +6172,7 @@
       </p:sp>
       <p:sp>
         <p:nvSpPr>
-          <p:cNvPr id="261796730" name="Date Placeholder 4"/>
+          <p:cNvPr id="916026371" name="Date Placeholder 4"/>
           <p:cNvSpPr>
             <a:spLocks noGrp="1"/>
           </p:cNvSpPr>
@@ -6194,7 +6194,7 @@
       </p:sp>
       <p:sp>
         <p:nvSpPr>
-          <p:cNvPr id="1403621447" name="Footer Placeholder 5"/>
+          <p:cNvPr id="1276795435" name="Footer Placeholder 5"/>
           <p:cNvSpPr>
             <a:spLocks noGrp="1"/>
           </p:cNvSpPr>
@@ -6216,7 +6216,7 @@
       </p:sp>
       <p:sp>
         <p:nvSpPr>
-          <p:cNvPr id="1848959722" name="Slide Number Placeholder 6"/>
+          <p:cNvPr id="210806640" name="Slide Number Placeholder 6"/>
           <p:cNvSpPr>
             <a:spLocks noGrp="1"/>
           </p:cNvSpPr>
@@ -6279,16 +6279,16 @@
       </p:grpSpPr>
       <p:grpSp>
         <p:nvGrpSpPr>
-          <p:cNvPr id="589553310" name="Group 13"/>
+          <p:cNvPr id="1366065068" name="Group 13"/>
           <p:cNvGrpSpPr/>
           <p:nvPr/>
         </p:nvGrpSpPr>
         <p:grpSpPr bwMode="auto">
           <a:xfrm>
             <a:off x="0" y="0"/>
-            <a:ext cx="2842683" cy="6858000"/>
+            <a:ext cx="2842682" cy="6858000"/>
             <a:chOff x="0" y="0"/>
-            <a:chExt cx="2842683" cy="6858000"/>
+            <a:chExt cx="2842682" cy="6858000"/>
           </a:xfrm>
         </p:grpSpPr>
         <p:sp>
@@ -6349,7 +6349,7 @@
           <p:spPr bwMode="auto">
             <a:xfrm>
               <a:off x="0" y="0"/>
-              <a:ext cx="1011766" cy="4624387"/>
+              <a:ext cx="1011766" cy="4624386"/>
             </a:xfrm>
             <a:custGeom>
               <a:avLst/>
@@ -6495,7 +6495,7 @@
           <p:spPr bwMode="auto">
             <a:xfrm>
               <a:off x="0" y="5257800"/>
-              <a:ext cx="2842683" cy="1600200"/>
+              <a:ext cx="2842682" cy="1600200"/>
             </a:xfrm>
             <a:custGeom>
               <a:avLst/>
@@ -6589,7 +6589,7 @@
       </p:grpSp>
       <p:sp>
         <p:nvSpPr>
-          <p:cNvPr id="1453930543" name="Title Placeholder 1"/>
+          <p:cNvPr id="1124838969" name="Title Placeholder 1"/>
           <p:cNvSpPr>
             <a:spLocks noGrp="1"/>
           </p:cNvSpPr>
@@ -6600,7 +6600,7 @@
         <p:spPr bwMode="auto">
           <a:xfrm>
             <a:off x="1309510" y="457200"/>
-            <a:ext cx="10272889" cy="1981199"/>
+            <a:ext cx="10272888" cy="1981199"/>
           </a:xfrm>
           <a:prstGeom prst="rect">
             <a:avLst/>
@@ -6626,7 +6626,7 @@
       </p:sp>
       <p:sp>
         <p:nvSpPr>
-          <p:cNvPr id="312218764" name="Text Placeholder 2"/>
+          <p:cNvPr id="690627408" name="Text Placeholder 2"/>
           <p:cNvSpPr>
             <a:spLocks noGrp="1"/>
           </p:cNvSpPr>
@@ -6702,7 +6702,7 @@
       </p:sp>
       <p:sp>
         <p:nvSpPr>
-          <p:cNvPr id="286641308" name="Date Placeholder 3"/>
+          <p:cNvPr id="668239790" name="Date Placeholder 3"/>
           <p:cNvSpPr>
             <a:spLocks noGrp="1"/>
           </p:cNvSpPr>
@@ -6741,7 +6741,7 @@
       </p:sp>
       <p:sp>
         <p:nvSpPr>
-          <p:cNvPr id="1686638562" name="Footer Placeholder 4"/>
+          <p:cNvPr id="1101642993" name="Footer Placeholder 4"/>
           <p:cNvSpPr>
             <a:spLocks noGrp="1"/>
           </p:cNvSpPr>
@@ -6780,7 +6780,7 @@
       </p:sp>
       <p:sp>
         <p:nvSpPr>
-          <p:cNvPr id="582489281" name="Slide Number Placeholder 5"/>
+          <p:cNvPr id="1070333360" name="Slide Number Placeholder 5"/>
           <p:cNvSpPr>
             <a:spLocks noGrp="1"/>
           </p:cNvSpPr>
@@ -7263,7 +7263,7 @@
       </p:grpSpPr>
       <p:sp>
         <p:nvSpPr>
-          <p:cNvPr id="760665701" name="Google Shape;128;p13"/>
+          <p:cNvPr id="253856871" name="Google Shape;128;p13"/>
           <p:cNvSpPr txBox="1">
             <a:spLocks noGrp="1"/>
           </p:cNvSpPr>
@@ -7285,7 +7285,7 @@
           </a:ln>
         </p:spPr>
         <p:txBody>
-          <a:bodyPr spcFirstLastPara="1" wrap="square" lIns="91424" tIns="45699" rIns="91424" bIns="45699" anchor="b" anchorCtr="0">
+          <a:bodyPr spcFirstLastPara="1" wrap="square" lIns="91423" tIns="45699" rIns="91423" bIns="45699" anchor="b" anchorCtr="0">
             <a:noAutofit/>
           </a:bodyPr>
           <a:lstStyle/>
@@ -7307,7 +7307,7 @@
       </p:sp>
       <p:sp>
         <p:nvSpPr>
-          <p:cNvPr id="2039238933" name="Google Shape;129;p13"/>
+          <p:cNvPr id="669226805" name="Google Shape;129;p13"/>
           <p:cNvSpPr txBox="1">
             <a:spLocks noGrp="1"/>
           </p:cNvSpPr>
@@ -7329,7 +7329,7 @@
           </a:ln>
         </p:spPr>
         <p:txBody>
-          <a:bodyPr spcFirstLastPara="1" wrap="square" lIns="91424" tIns="45699" rIns="91424" bIns="45699" anchor="t" anchorCtr="0">
+          <a:bodyPr spcFirstLastPara="1" wrap="square" lIns="91423" tIns="45699" rIns="91423" bIns="45699" anchor="t" anchorCtr="0">
             <a:normAutofit/>
           </a:bodyPr>
           <a:lstStyle/>
@@ -7563,7 +7563,7 @@
       </p:sp>
       <p:pic>
         <p:nvPicPr>
-          <p:cNvPr id="1595572028" name="Google Shape;130;p13"/>
+          <p:cNvPr id="812222016" name="Google Shape;130;p13"/>
           <p:cNvPicPr/>
           <p:nvPr/>
         </p:nvPicPr>
@@ -7589,7 +7589,7 @@
       </p:pic>
       <p:graphicFrame>
         <p:nvGraphicFramePr>
-          <p:cNvPr id="1092780569" name="Google Shape;131;p13"/>
+          <p:cNvPr id="1681268431" name="Google Shape;131;p13"/>
           <p:cNvGraphicFramePr>
             <a:graphicFrameLocks xmlns:a="http://schemas.openxmlformats.org/drawingml/2006/main"/>
           </p:cNvGraphicFramePr>
@@ -7677,7 +7677,7 @@
                       <a:endParaRPr sz="2200"/>
                     </a:p>
                   </a:txBody>
-                  <a:tcPr marL="91424" marR="91424" marT="91424" marB="91424">
+                  <a:tcPr marL="91423" marR="91423" marT="91423" marB="91423">
                     <a:lnL w="9524" algn="ctr">
                       <a:solidFill>
                         <a:srgbClr val="9E9E9E">
@@ -7777,7 +7777,7 @@
                       <a:endParaRPr sz="2200"/>
                     </a:p>
                   </a:txBody>
-                  <a:tcPr marL="91424" marR="91424" marT="91424" marB="91424">
+                  <a:tcPr marL="91423" marR="91423" marT="91423" marB="91423">
                     <a:lnL w="9524" algn="ctr">
                       <a:solidFill>
                         <a:srgbClr val="9E9E9E">
@@ -7848,7 +7848,7 @@
       </p:grpSpPr>
       <p:sp>
         <p:nvSpPr>
-          <p:cNvPr id="929129808" name="Google Shape;140;p14"/>
+          <p:cNvPr id="1597237891" name="Google Shape;140;p14"/>
           <p:cNvSpPr txBox="1">
             <a:spLocks noGrp="1"/>
           </p:cNvSpPr>
@@ -7866,7 +7866,7 @@
           </a:ln>
         </p:spPr>
         <p:txBody>
-          <a:bodyPr spcFirstLastPara="1" wrap="square" lIns="91424" tIns="45699" rIns="91424" bIns="45699" anchor="ctr" anchorCtr="0">
+          <a:bodyPr spcFirstLastPara="1" wrap="square" lIns="91423" tIns="45699" rIns="91423" bIns="45699" anchor="ctr" anchorCtr="0">
             <a:normAutofit/>
           </a:bodyPr>
           <a:lstStyle/>
@@ -7887,16 +7887,16 @@
               <a:defRPr/>
             </a:pPr>
             <a:r>
-              <a:rPr lang="en-US" sz="2800" b="1"/>
+              <a:rPr lang="en-US" sz="4800" b="1"/>
               <a:t>OUTLINE</a:t>
             </a:r>
-            <a:endParaRPr sz="2800" b="1"/>
-          </a:p>
-        </p:txBody>
-      </p:sp>
-      <p:sp>
-        <p:nvSpPr>
-          <p:cNvPr id="1340791338" name="Google Shape;141;p14"/>
+            <a:endParaRPr sz="4800" b="1"/>
+          </a:p>
+        </p:txBody>
+      </p:sp>
+      <p:sp>
+        <p:nvSpPr>
+          <p:cNvPr id="1392175171" name="Google Shape;141;p14"/>
           <p:cNvSpPr txBox="1">
             <a:spLocks noGrp="1"/>
           </p:cNvSpPr>
@@ -7918,221 +7918,309 @@
           </a:ln>
         </p:spPr>
         <p:txBody>
-          <a:bodyPr spcFirstLastPara="1" wrap="square" lIns="91424" tIns="45699" rIns="91424" bIns="45699" anchor="t" anchorCtr="0">
+          <a:bodyPr spcFirstLastPara="1" wrap="square" lIns="91423" tIns="45699" rIns="91423" bIns="45699" anchor="t" anchorCtr="0">
             <a:normAutofit/>
           </a:bodyPr>
           <a:lstStyle/>
           <a:p>
-            <a:pPr marL="457200" lvl="0" indent="-429259" algn="just" rtl="0">
+            <a:pPr marL="355878" lvl="0" indent="-327936" algn="just" rtl="0">
               <a:spcBef>
                 <a:spcPts val="0"/>
               </a:spcBef>
               <a:spcAft>
                 <a:spcPts val="0"/>
               </a:spcAft>
+              <a:buClr>
+                <a:schemeClr val="accent1">
+                  <a:lumMod val="75000"/>
+                </a:schemeClr>
+              </a:buClr>
               <a:buSzPts val="1600"/>
               <a:buFont typeface="Times New Roman"/>
-              <a:buAutoNum type="arabicPeriod"/>
-              <a:defRPr/>
-            </a:pPr>
-            <a:r>
-              <a:rPr lang="en-US" sz="2000">
+              <a:buAutoNum type="arabicParenR"/>
+              <a:defRPr/>
+            </a:pPr>
+            <a:r>
+              <a:rPr lang="en-US" sz="2200">
+                <a:solidFill>
+                  <a:schemeClr val="tx1"/>
+                </a:solidFill>
                 <a:latin typeface="Times New Roman"/>
                 <a:ea typeface="Times New Roman"/>
                 <a:cs typeface="Times New Roman"/>
               </a:rPr>
               <a:t>Introduction</a:t>
             </a:r>
-            <a:endParaRPr sz="2000">
+            <a:endParaRPr sz="2200">
+              <a:solidFill>
+                <a:schemeClr val="tx1"/>
+              </a:solidFill>
               <a:latin typeface="Times New Roman"/>
               <a:ea typeface="Times New Roman"/>
               <a:cs typeface="Times New Roman"/>
             </a:endParaRPr>
           </a:p>
           <a:p>
-            <a:pPr marL="457200" lvl="0" indent="-429259" algn="just" rtl="0">
+            <a:pPr marL="355878" lvl="0" indent="-327936" algn="just" rtl="0">
               <a:spcBef>
                 <a:spcPts val="479"/>
               </a:spcBef>
               <a:spcAft>
                 <a:spcPts val="0"/>
               </a:spcAft>
+              <a:buClr>
+                <a:schemeClr val="accent1">
+                  <a:lumMod val="75000"/>
+                </a:schemeClr>
+              </a:buClr>
               <a:buSzPts val="1600"/>
               <a:buFont typeface="Times New Roman"/>
-              <a:buAutoNum type="arabicPeriod"/>
-              <a:defRPr/>
-            </a:pPr>
-            <a:r>
-              <a:rPr lang="en-US" sz="2000">
+              <a:buAutoNum type="arabicParenR"/>
+              <a:defRPr/>
+            </a:pPr>
+            <a:r>
+              <a:rPr lang="en-US" sz="2200">
+                <a:solidFill>
+                  <a:schemeClr val="tx1"/>
+                </a:solidFill>
                 <a:latin typeface="Times New Roman"/>
                 <a:ea typeface="Times New Roman"/>
                 <a:cs typeface="Times New Roman"/>
               </a:rPr>
               <a:t>Problem Statement &amp; Objectives</a:t>
             </a:r>
-            <a:endParaRPr sz="2000">
+            <a:endParaRPr sz="2200">
+              <a:solidFill>
+                <a:schemeClr val="tx1"/>
+              </a:solidFill>
               <a:latin typeface="Times New Roman"/>
               <a:ea typeface="Times New Roman"/>
               <a:cs typeface="Times New Roman"/>
             </a:endParaRPr>
           </a:p>
           <a:p>
-            <a:pPr marL="457200" lvl="0" indent="-429259" algn="just" rtl="0">
+            <a:pPr marL="355878" lvl="0" indent="-327936" algn="just" rtl="0">
               <a:spcBef>
                 <a:spcPts val="479"/>
               </a:spcBef>
               <a:spcAft>
                 <a:spcPts val="0"/>
               </a:spcAft>
+              <a:buClr>
+                <a:schemeClr val="accent1">
+                  <a:lumMod val="75000"/>
+                </a:schemeClr>
+              </a:buClr>
               <a:buSzPts val="1600"/>
               <a:buFont typeface="Times New Roman"/>
-              <a:buAutoNum type="arabicPeriod"/>
-              <a:defRPr/>
-            </a:pPr>
-            <a:r>
-              <a:rPr lang="en-US" sz="2000">
+              <a:buAutoNum type="arabicParenR"/>
+              <a:defRPr/>
+            </a:pPr>
+            <a:r>
+              <a:rPr lang="en-US" sz="2200">
+                <a:solidFill>
+                  <a:schemeClr val="tx1"/>
+                </a:solidFill>
                 <a:latin typeface="Times New Roman"/>
                 <a:ea typeface="Times New Roman"/>
                 <a:cs typeface="Times New Roman"/>
               </a:rPr>
               <a:t>Literature Survey (IEEE)</a:t>
             </a:r>
-            <a:endParaRPr sz="2000">
+            <a:endParaRPr sz="2200">
+              <a:solidFill>
+                <a:schemeClr val="tx1"/>
+              </a:solidFill>
               <a:latin typeface="Times New Roman"/>
               <a:ea typeface="Times New Roman"/>
               <a:cs typeface="Times New Roman"/>
             </a:endParaRPr>
           </a:p>
           <a:p>
-            <a:pPr marL="457200" lvl="0" indent="-429259" algn="just" rtl="0">
+            <a:pPr marL="355878" lvl="0" indent="-327936" algn="just" rtl="0">
               <a:spcBef>
                 <a:spcPts val="479"/>
               </a:spcBef>
               <a:spcAft>
                 <a:spcPts val="0"/>
               </a:spcAft>
+              <a:buClr>
+                <a:schemeClr val="accent1">
+                  <a:lumMod val="75000"/>
+                </a:schemeClr>
+              </a:buClr>
               <a:buSzPts val="1600"/>
               <a:buFont typeface="Times New Roman"/>
-              <a:buAutoNum type="arabicPeriod"/>
-              <a:defRPr/>
-            </a:pPr>
-            <a:r>
-              <a:rPr lang="en-US" sz="2000">
+              <a:buAutoNum type="arabicParenR"/>
+              <a:defRPr/>
+            </a:pPr>
+            <a:r>
+              <a:rPr lang="en-US" sz="2200">
+                <a:solidFill>
+                  <a:schemeClr val="tx1"/>
+                </a:solidFill>
                 <a:latin typeface="Times New Roman"/>
                 <a:ea typeface="Times New Roman"/>
                 <a:cs typeface="Times New Roman"/>
               </a:rPr>
               <a:t>Comparison of Existing Methods</a:t>
             </a:r>
-            <a:endParaRPr sz="2000">
+            <a:endParaRPr sz="2200">
+              <a:solidFill>
+                <a:schemeClr val="tx1"/>
+              </a:solidFill>
               <a:latin typeface="Times New Roman"/>
               <a:ea typeface="Times New Roman"/>
               <a:cs typeface="Times New Roman"/>
             </a:endParaRPr>
           </a:p>
           <a:p>
-            <a:pPr marL="457200" lvl="0" indent="-429259" algn="just" rtl="0">
+            <a:pPr marL="355878" lvl="0" indent="-327936" algn="just" rtl="0">
               <a:spcBef>
                 <a:spcPts val="479"/>
               </a:spcBef>
               <a:spcAft>
                 <a:spcPts val="0"/>
               </a:spcAft>
+              <a:buClr>
+                <a:schemeClr val="accent1">
+                  <a:lumMod val="75000"/>
+                </a:schemeClr>
+              </a:buClr>
               <a:buSzPts val="1600"/>
               <a:buFont typeface="Times New Roman"/>
-              <a:buAutoNum type="arabicPeriod"/>
-              <a:defRPr/>
-            </a:pPr>
-            <a:r>
-              <a:rPr lang="en-US" sz="2000">
+              <a:buAutoNum type="arabicParenR"/>
+              <a:defRPr/>
+            </a:pPr>
+            <a:r>
+              <a:rPr lang="en-US" sz="2200">
+                <a:solidFill>
+                  <a:schemeClr val="tx1"/>
+                </a:solidFill>
                 <a:latin typeface="Times New Roman"/>
                 <a:ea typeface="Times New Roman"/>
                 <a:cs typeface="Times New Roman"/>
               </a:rPr>
               <a:t>Datasets &amp; Preprocessing</a:t>
             </a:r>
-            <a:endParaRPr sz="2000">
+            <a:endParaRPr sz="2200">
+              <a:solidFill>
+                <a:schemeClr val="tx1"/>
+              </a:solidFill>
               <a:latin typeface="Times New Roman"/>
               <a:ea typeface="Times New Roman"/>
               <a:cs typeface="Times New Roman"/>
             </a:endParaRPr>
           </a:p>
           <a:p>
-            <a:pPr marL="457200" lvl="0" indent="-429259" algn="just" rtl="0">
+            <a:pPr marL="355878" lvl="0" indent="-327936" algn="just" rtl="0">
               <a:spcBef>
                 <a:spcPts val="479"/>
               </a:spcBef>
               <a:spcAft>
                 <a:spcPts val="0"/>
               </a:spcAft>
+              <a:buClr>
+                <a:schemeClr val="accent1">
+                  <a:lumMod val="75000"/>
+                </a:schemeClr>
+              </a:buClr>
               <a:buSzPts val="1600"/>
               <a:buFont typeface="Times New Roman"/>
-              <a:buAutoNum type="arabicPeriod"/>
-              <a:defRPr/>
-            </a:pPr>
-            <a:r>
-              <a:rPr lang="en-US" sz="2000">
+              <a:buAutoNum type="arabicParenR"/>
+              <a:defRPr/>
+            </a:pPr>
+            <a:r>
+              <a:rPr lang="en-US" sz="2200">
+                <a:solidFill>
+                  <a:schemeClr val="tx1"/>
+                </a:solidFill>
                 <a:latin typeface="Times New Roman"/>
                 <a:ea typeface="Times New Roman"/>
                 <a:cs typeface="Times New Roman"/>
               </a:rPr>
               <a:t>Methodology (Tasks 1–3)</a:t>
             </a:r>
-            <a:endParaRPr sz="2000">
+            <a:endParaRPr sz="2200">
+              <a:solidFill>
+                <a:schemeClr val="tx1"/>
+              </a:solidFill>
               <a:latin typeface="Times New Roman"/>
               <a:ea typeface="Times New Roman"/>
               <a:cs typeface="Times New Roman"/>
             </a:endParaRPr>
           </a:p>
           <a:p>
-            <a:pPr marL="457200" lvl="0" indent="-429259" algn="just" rtl="0">
+            <a:pPr marL="355878" lvl="0" indent="-327936" algn="just" rtl="0">
               <a:spcBef>
                 <a:spcPts val="479"/>
               </a:spcBef>
               <a:spcAft>
                 <a:spcPts val="0"/>
               </a:spcAft>
+              <a:buClr>
+                <a:schemeClr val="accent1">
+                  <a:lumMod val="75000"/>
+                </a:schemeClr>
+              </a:buClr>
               <a:buSzPts val="1600"/>
               <a:buFont typeface="Times New Roman"/>
-              <a:buAutoNum type="arabicPeriod"/>
-              <a:defRPr/>
-            </a:pPr>
-            <a:r>
-              <a:rPr lang="en-US" sz="2000">
+              <a:buAutoNum type="arabicParenR"/>
+              <a:defRPr/>
+            </a:pPr>
+            <a:r>
+              <a:rPr lang="en-US" sz="2200">
+                <a:solidFill>
+                  <a:schemeClr val="tx1"/>
+                </a:solidFill>
                 <a:latin typeface="Times New Roman"/>
                 <a:ea typeface="Times New Roman"/>
                 <a:cs typeface="Times New Roman"/>
               </a:rPr>
               <a:t>Results &amp; Discussion</a:t>
             </a:r>
-            <a:endParaRPr sz="2000">
+            <a:endParaRPr sz="2200">
+              <a:solidFill>
+                <a:schemeClr val="tx1"/>
+              </a:solidFill>
               <a:latin typeface="Times New Roman"/>
               <a:ea typeface="Times New Roman"/>
               <a:cs typeface="Times New Roman"/>
             </a:endParaRPr>
           </a:p>
           <a:p>
-            <a:pPr marL="457200" lvl="0" indent="-429259" algn="just" rtl="0">
+            <a:pPr marL="355878" lvl="0" indent="-327936" algn="just" rtl="0">
               <a:spcBef>
                 <a:spcPts val="479"/>
               </a:spcBef>
               <a:spcAft>
                 <a:spcPts val="0"/>
               </a:spcAft>
+              <a:buClr>
+                <a:schemeClr val="accent1">
+                  <a:lumMod val="75000"/>
+                </a:schemeClr>
+              </a:buClr>
               <a:buSzPts val="1600"/>
               <a:buFont typeface="Times New Roman"/>
-              <a:buAutoNum type="arabicPeriod"/>
-              <a:defRPr/>
-            </a:pPr>
-            <a:r>
-              <a:rPr lang="en-US" sz="2000">
+              <a:buAutoNum type="arabicParenR"/>
+              <a:defRPr/>
+            </a:pPr>
+            <a:r>
+              <a:rPr lang="en-US" sz="2200">
+                <a:solidFill>
+                  <a:schemeClr val="tx1"/>
+                </a:solidFill>
                 <a:latin typeface="Times New Roman"/>
                 <a:ea typeface="Times New Roman"/>
                 <a:cs typeface="Times New Roman"/>
               </a:rPr>
               <a:t>Conclusion &amp; References</a:t>
             </a:r>
-            <a:endParaRPr sz="2000">
+            <a:endParaRPr sz="2200">
+              <a:solidFill>
+                <a:schemeClr val="tx1"/>
+              </a:solidFill>
               <a:latin typeface="Times New Roman"/>
               <a:ea typeface="Times New Roman"/>
               <a:cs typeface="Times New Roman"/>
@@ -8142,7 +8230,7 @@
       </p:sp>
       <p:sp>
         <p:nvSpPr>
-          <p:cNvPr id="2004524345" name="Google Shape;143;p14"/>
+          <p:cNvPr id="1599759980" name="Google Shape;143;p14"/>
           <p:cNvSpPr txBox="1">
             <a:spLocks noGrp="1"/>
           </p:cNvSpPr>
@@ -8160,7 +8248,7 @@
           </a:ln>
         </p:spPr>
         <p:txBody>
-          <a:bodyPr spcFirstLastPara="1" wrap="square" lIns="91424" tIns="45699" rIns="91424" bIns="45699" anchor="ctr" anchorCtr="0">
+          <a:bodyPr spcFirstLastPara="1" wrap="square" lIns="91423" tIns="45699" rIns="91423" bIns="45699" anchor="ctr" anchorCtr="0">
             <a:noAutofit/>
           </a:bodyPr>
           <a:lstStyle/>
@@ -8185,7 +8273,7 @@
       </p:sp>
       <p:pic>
         <p:nvPicPr>
-          <p:cNvPr id="1067646883" name="Google Shape;144;p14"/>
+          <p:cNvPr id="1707665816" name="Google Shape;144;p14"/>
           <p:cNvPicPr/>
           <p:nvPr/>
         </p:nvPicPr>
@@ -8244,7 +8332,7 @@
       </p:grpSpPr>
       <p:sp>
         <p:nvSpPr>
-          <p:cNvPr id="773562156" name="Title 1"/>
+          <p:cNvPr id="1508768679" name="Title 1"/>
           <p:cNvSpPr>
             <a:spLocks noGrp="1"/>
           </p:cNvSpPr>
@@ -8261,16 +8349,16 @@
               <a:defRPr/>
             </a:pPr>
             <a:r>
-              <a:rPr sz="2800" b="1"/>
+              <a:rPr sz="4800" b="1"/>
               <a:t>Introduction</a:t>
             </a:r>
-            <a:endParaRPr/>
-          </a:p>
-        </p:txBody>
-      </p:sp>
-      <p:sp>
-        <p:nvSpPr>
-          <p:cNvPr id="2076981819" name="Content Placeholder 2"/>
+            <a:endParaRPr sz="7200"/>
+          </a:p>
+        </p:txBody>
+      </p:sp>
+      <p:sp>
+        <p:nvSpPr>
+          <p:cNvPr id="1438928569" name="Content Placeholder 2"/>
           <p:cNvSpPr>
             <a:spLocks noGrp="1"/>
           </p:cNvSpPr>
@@ -8279,13 +8367,15 @@
           </p:nvPr>
         </p:nvSpPr>
         <p:spPr bwMode="auto">
-          <a:xfrm>
-            <a:off x="1466666" y="1949999"/>
-            <a:ext cx="8666666" cy="4299999"/>
+          <a:xfrm flipH="0" flipV="0">
+            <a:off x="1883384" y="1949998"/>
+            <a:ext cx="8666665" cy="3848344"/>
           </a:xfrm>
         </p:spPr>
         <p:txBody>
-          <a:bodyPr anchor="t"/>
+          <a:bodyPr vertOverflow="overflow" horzOverflow="overflow" vert="horz" wrap="square" lIns="91440" tIns="45720" rIns="91440" bIns="45720" numCol="1" spcCol="0" rtlCol="0" fromWordArt="0" anchor="t" anchorCtr="0" forceAA="0" upright="0" compatLnSpc="0">
+            <a:normAutofit/>
+          </a:bodyPr>
           <a:lstStyle/>
           <a:p>
             <a:pPr>
@@ -8295,14 +8385,14 @@
               <a:defRPr/>
             </a:pPr>
             <a:r>
-              <a:rPr sz="1400" b="1"/>
+              <a:rPr sz="2000" b="1"/>
               <a:t>The clinical problem: </a:t>
             </a:r>
             <a:r>
-              <a:rPr sz="1400"/>
+              <a:rPr sz="1800"/>
               <a:t>Diabetic retinopathy (DR) and diabetic macular edema (DME) are leading causes of preventable blindness, mostly affecting the working-age population.</a:t>
             </a:r>
-            <a:endParaRPr/>
+            <a:endParaRPr sz="3600"/>
           </a:p>
           <a:p>
             <a:pPr>
@@ -8312,14 +8402,14 @@
               <a:defRPr/>
             </a:pPr>
             <a:r>
-              <a:rPr sz="1400" b="1"/>
+              <a:rPr sz="2000" b="1"/>
               <a:t>Why UWF imaging: </a:t>
             </a:r>
             <a:r>
-              <a:rPr sz="1400"/>
+              <a:rPr sz="1800"/>
               <a:t>Ultra-widefield (UWF) fundus imaging captures peripheral lesions that standard fundus photography can miss, enabling earlier detection of DR and DME.</a:t>
             </a:r>
-            <a:endParaRPr/>
+            <a:endParaRPr sz="3600"/>
           </a:p>
           <a:p>
             <a:pPr>
@@ -8329,14 +8419,14 @@
               <a:defRPr/>
             </a:pPr>
             <a:r>
-              <a:rPr sz="1400" b="1"/>
+              <a:rPr sz="2000" b="1"/>
               <a:t>Challenges: </a:t>
             </a:r>
             <a:r>
-              <a:rPr sz="1400"/>
+              <a:rPr sz="1800"/>
               <a:t>Image quality varies with patient cooperation and imaging conditions, and interpreting wide-field images needs considerable expertise.</a:t>
             </a:r>
-            <a:endParaRPr/>
+            <a:endParaRPr sz="3600"/>
           </a:p>
           <a:p>
             <a:pPr>
@@ -8346,20 +8436,20 @@
               <a:defRPr/>
             </a:pPr>
             <a:r>
-              <a:rPr sz="1400" b="1"/>
+              <a:rPr sz="2000" b="1"/>
               <a:t>Opportunity: </a:t>
             </a:r>
             <a:r>
-              <a:rPr sz="1400"/>
+              <a:rPr sz="1800"/>
               <a:t>CNNs such as EfficientNet and ResNet, with transfer learning, ensembling and test-time augmentation, can make DR/DME screening faster and more scalable.</a:t>
             </a:r>
-            <a:endParaRPr/>
-          </a:p>
-        </p:txBody>
-      </p:sp>
-      <p:sp>
-        <p:nvSpPr>
-          <p:cNvPr id="1711876885" name="Google Shape;181;p17"/>
+            <a:endParaRPr sz="3600"/>
+          </a:p>
+        </p:txBody>
+      </p:sp>
+      <p:sp>
+        <p:nvSpPr>
+          <p:cNvPr id="1508295049" name="Google Shape;181;p17"/>
           <p:cNvSpPr txBox="1">
             <a:spLocks noGrp="1"/>
           </p:cNvSpPr>
@@ -8377,7 +8467,7 @@
           </a:ln>
         </p:spPr>
         <p:txBody>
-          <a:bodyPr spcFirstLastPara="1" wrap="square" lIns="91424" tIns="45699" rIns="91424" bIns="45699" anchor="ctr" anchorCtr="0">
+          <a:bodyPr spcFirstLastPara="1" wrap="square" lIns="91423" tIns="45699" rIns="91423" bIns="45699" anchor="ctr" anchorCtr="0">
             <a:noAutofit/>
           </a:bodyPr>
           <a:lstStyle/>
@@ -8410,7 +8500,7 @@
       </p:sp>
       <p:pic>
         <p:nvPicPr>
-          <p:cNvPr id="1362378987" name="Picture 181" descr="image.png"/>
+          <p:cNvPr id="1869531843" name="Picture 181" descr="image.png"/>
           <p:cNvPicPr>
             <a:picLocks noChangeAspect="1"/>
           </p:cNvPicPr>
@@ -8465,7 +8555,7 @@
       </p:grpSpPr>
       <p:sp>
         <p:nvSpPr>
-          <p:cNvPr id="1062462554" name="Title 1"/>
+          <p:cNvPr id="1503934271" name="Title 1"/>
           <p:cNvSpPr>
             <a:spLocks noGrp="1"/>
           </p:cNvSpPr>
@@ -8482,16 +8572,16 @@
               <a:defRPr/>
             </a:pPr>
             <a:r>
-              <a:rPr sz="2400" b="1"/>
+              <a:rPr sz="4800" b="1"/>
               <a:t>Problem Statement &amp; Objectives</a:t>
             </a:r>
-            <a:endParaRPr/>
-          </a:p>
-        </p:txBody>
-      </p:sp>
-      <p:sp>
-        <p:nvSpPr>
-          <p:cNvPr id="1758097593" name="Content Placeholder 2"/>
+            <a:endParaRPr sz="9000"/>
+          </a:p>
+        </p:txBody>
+      </p:sp>
+      <p:sp>
+        <p:nvSpPr>
+          <p:cNvPr id="622317971" name="Content Placeholder 2"/>
           <p:cNvSpPr>
             <a:spLocks noGrp="1"/>
           </p:cNvSpPr>
@@ -8500,9 +8590,9 @@
           </p:nvPr>
         </p:nvSpPr>
         <p:spPr bwMode="auto">
-          <a:xfrm>
-            <a:off x="1466666" y="1949999"/>
-            <a:ext cx="8666666" cy="4299999"/>
+          <a:xfrm flipH="0" flipV="0">
+            <a:off x="1931009" y="2500312"/>
+            <a:ext cx="8666665" cy="2963872"/>
           </a:xfrm>
         </p:spPr>
         <p:txBody>
@@ -8516,14 +8606,14 @@
               <a:defRPr/>
             </a:pPr>
             <a:r>
-              <a:rPr sz="1400" b="1"/>
+              <a:rPr sz="2000" b="1"/>
               <a:t>Problem statement: </a:t>
             </a:r>
             <a:r>
-              <a:rPr sz="1400"/>
+              <a:rPr sz="2000"/>
               <a:t>Manual analysis of UWF fundus images is time-consuming and expertise-dependent, and poor-quality images risk misdiagnosis or overlooked disease.</a:t>
             </a:r>
-            <a:endParaRPr/>
+            <a:endParaRPr sz="3600"/>
           </a:p>
           <a:p>
             <a:pPr>
@@ -8533,14 +8623,14 @@
               <a:defRPr/>
             </a:pPr>
             <a:r>
-              <a:rPr sz="1400" b="1"/>
+              <a:rPr sz="2000" b="1"/>
               <a:t>Objective: </a:t>
             </a:r>
             <a:r>
-              <a:rPr sz="1400"/>
+              <a:rPr sz="2000"/>
               <a:t>Design deep learning solutions for the MICCAI 2024 UWF4DR challenge covering three tasks:</a:t>
             </a:r>
-            <a:endParaRPr/>
+            <a:endParaRPr sz="3600"/>
           </a:p>
           <a:p>
             <a:pPr>
@@ -8550,14 +8640,14 @@
               <a:defRPr/>
             </a:pPr>
             <a:r>
-              <a:rPr sz="1400" b="1"/>
+              <a:rPr sz="2000" b="1"/>
               <a:t>Task 1 – </a:t>
             </a:r>
             <a:r>
-              <a:rPr sz="1400"/>
+              <a:rPr sz="2000"/>
               <a:t>Image quality assessment (good vs. bad quality)</a:t>
             </a:r>
-            <a:endParaRPr/>
+            <a:endParaRPr sz="3600"/>
           </a:p>
           <a:p>
             <a:pPr>
@@ -8567,14 +8657,14 @@
               <a:defRPr/>
             </a:pPr>
             <a:r>
-              <a:rPr sz="1400" b="1"/>
+              <a:rPr sz="2000" b="1"/>
               <a:t>Task 2 – </a:t>
             </a:r>
             <a:r>
-              <a:rPr sz="1400"/>
+              <a:rPr sz="2000"/>
               <a:t>Detection of referable diabetic retinopathy (RDR)</a:t>
             </a:r>
-            <a:endParaRPr/>
+            <a:endParaRPr sz="3600"/>
           </a:p>
           <a:p>
             <a:pPr>
@@ -8584,20 +8674,20 @@
               <a:defRPr/>
             </a:pPr>
             <a:r>
-              <a:rPr sz="1400" b="1"/>
+              <a:rPr sz="2000" b="1"/>
               <a:t>Task 3 – </a:t>
             </a:r>
             <a:r>
-              <a:rPr sz="1400"/>
+              <a:rPr sz="2000"/>
               <a:t>Identification of diabetic macular edema (DME)</a:t>
             </a:r>
-            <a:endParaRPr/>
-          </a:p>
-        </p:txBody>
-      </p:sp>
-      <p:sp>
-        <p:nvSpPr>
-          <p:cNvPr id="1028002825" name="Google Shape;181;p17"/>
+            <a:endParaRPr sz="2600"/>
+          </a:p>
+        </p:txBody>
+      </p:sp>
+      <p:sp>
+        <p:nvSpPr>
+          <p:cNvPr id="778261249" name="Google Shape;181;p17"/>
           <p:cNvSpPr txBox="1">
             <a:spLocks noGrp="1"/>
           </p:cNvSpPr>
@@ -8615,7 +8705,7 @@
           </a:ln>
         </p:spPr>
         <p:txBody>
-          <a:bodyPr spcFirstLastPara="1" wrap="square" lIns="91424" tIns="45699" rIns="91424" bIns="45699" anchor="ctr" anchorCtr="0">
+          <a:bodyPr spcFirstLastPara="1" wrap="square" lIns="91423" tIns="45699" rIns="91423" bIns="45699" anchor="ctr" anchorCtr="0">
             <a:noAutofit/>
           </a:bodyPr>
           <a:lstStyle/>
@@ -8648,7 +8738,7 @@
       </p:sp>
       <p:pic>
         <p:nvPicPr>
-          <p:cNvPr id="1617712082" name="Picture 181" descr="image.png"/>
+          <p:cNvPr id="1054309692" name="Picture 181" descr="image.png"/>
           <p:cNvPicPr>
             <a:picLocks noChangeAspect="1"/>
           </p:cNvPicPr>
